--- a/HW_1_2025-Качалина_Екатерина/ДЗ1.pptx
+++ b/HW_1_2025-Качалина_Екатерина/ДЗ1.pptx
@@ -147,6 +147,11 @@
       </a:defRPr>
     </a:lvl9pPr>
   </p:defaultTextStyle>
+  <p:extLst>
+    <p:ext uri="{EFAFB233-063F-42B5-8137-9DF3F51BA10A}">
+      <p15:sldGuideLst xmlns:p15="http://schemas.microsoft.com/office/powerpoint/2012/main"/>
+    </p:ext>
+  </p:extLst>
 </p:presentation>
 </file>
 
@@ -297,7 +302,7 @@
           <a:p>
             <a:fld id="{55518EC5-1A73-411A-817F-B2985568381E}" type="datetimeFigureOut">
               <a:rPr lang="ru-RU" smtClean="0"/>
-              <a:t>30.12.2025</a:t>
+              <a:t>31.12.2025</a:t>
             </a:fld>
             <a:endParaRPr lang="ru-RU"/>
           </a:p>
@@ -495,7 +500,7 @@
           <a:p>
             <a:fld id="{55518EC5-1A73-411A-817F-B2985568381E}" type="datetimeFigureOut">
               <a:rPr lang="ru-RU" smtClean="0"/>
-              <a:t>30.12.2025</a:t>
+              <a:t>31.12.2025</a:t>
             </a:fld>
             <a:endParaRPr lang="ru-RU"/>
           </a:p>
@@ -703,7 +708,7 @@
           <a:p>
             <a:fld id="{55518EC5-1A73-411A-817F-B2985568381E}" type="datetimeFigureOut">
               <a:rPr lang="ru-RU" smtClean="0"/>
-              <a:t>30.12.2025</a:t>
+              <a:t>31.12.2025</a:t>
             </a:fld>
             <a:endParaRPr lang="ru-RU"/>
           </a:p>
@@ -901,7 +906,7 @@
           <a:p>
             <a:fld id="{55518EC5-1A73-411A-817F-B2985568381E}" type="datetimeFigureOut">
               <a:rPr lang="ru-RU" smtClean="0"/>
-              <a:t>30.12.2025</a:t>
+              <a:t>31.12.2025</a:t>
             </a:fld>
             <a:endParaRPr lang="ru-RU"/>
           </a:p>
@@ -1176,7 +1181,7 @@
           <a:p>
             <a:fld id="{55518EC5-1A73-411A-817F-B2985568381E}" type="datetimeFigureOut">
               <a:rPr lang="ru-RU" smtClean="0"/>
-              <a:t>30.12.2025</a:t>
+              <a:t>31.12.2025</a:t>
             </a:fld>
             <a:endParaRPr lang="ru-RU"/>
           </a:p>
@@ -1441,7 +1446,7 @@
           <a:p>
             <a:fld id="{55518EC5-1A73-411A-817F-B2985568381E}" type="datetimeFigureOut">
               <a:rPr lang="ru-RU" smtClean="0"/>
-              <a:t>30.12.2025</a:t>
+              <a:t>31.12.2025</a:t>
             </a:fld>
             <a:endParaRPr lang="ru-RU"/>
           </a:p>
@@ -1853,7 +1858,7 @@
           <a:p>
             <a:fld id="{55518EC5-1A73-411A-817F-B2985568381E}" type="datetimeFigureOut">
               <a:rPr lang="ru-RU" smtClean="0"/>
-              <a:t>30.12.2025</a:t>
+              <a:t>31.12.2025</a:t>
             </a:fld>
             <a:endParaRPr lang="ru-RU"/>
           </a:p>
@@ -1994,7 +1999,7 @@
           <a:p>
             <a:fld id="{55518EC5-1A73-411A-817F-B2985568381E}" type="datetimeFigureOut">
               <a:rPr lang="ru-RU" smtClean="0"/>
-              <a:t>30.12.2025</a:t>
+              <a:t>31.12.2025</a:t>
             </a:fld>
             <a:endParaRPr lang="ru-RU"/>
           </a:p>
@@ -2107,7 +2112,7 @@
           <a:p>
             <a:fld id="{55518EC5-1A73-411A-817F-B2985568381E}" type="datetimeFigureOut">
               <a:rPr lang="ru-RU" smtClean="0"/>
-              <a:t>30.12.2025</a:t>
+              <a:t>31.12.2025</a:t>
             </a:fld>
             <a:endParaRPr lang="ru-RU"/>
           </a:p>
@@ -2418,7 +2423,7 @@
           <a:p>
             <a:fld id="{55518EC5-1A73-411A-817F-B2985568381E}" type="datetimeFigureOut">
               <a:rPr lang="ru-RU" smtClean="0"/>
-              <a:t>30.12.2025</a:t>
+              <a:t>31.12.2025</a:t>
             </a:fld>
             <a:endParaRPr lang="ru-RU"/>
           </a:p>
@@ -2706,7 +2711,7 @@
           <a:p>
             <a:fld id="{55518EC5-1A73-411A-817F-B2985568381E}" type="datetimeFigureOut">
               <a:rPr lang="ru-RU" smtClean="0"/>
-              <a:t>30.12.2025</a:t>
+              <a:t>31.12.2025</a:t>
             </a:fld>
             <a:endParaRPr lang="ru-RU"/>
           </a:p>
@@ -2947,7 +2952,7 @@
           <a:p>
             <a:fld id="{55518EC5-1A73-411A-817F-B2985568381E}" type="datetimeFigureOut">
               <a:rPr lang="ru-RU" smtClean="0"/>
-              <a:t>30.12.2025</a:t>
+              <a:t>31.12.2025</a:t>
             </a:fld>
             <a:endParaRPr lang="ru-RU"/>
           </a:p>
@@ -3814,7 +3819,7 @@
         <p:spPr>
           <a:xfrm>
             <a:off x="9422296" y="1214764"/>
-            <a:ext cx="2625325" cy="2031325"/>
+            <a:ext cx="2625325" cy="1477328"/>
           </a:xfrm>
           <a:prstGeom prst="rect">
             <a:avLst/>
@@ -3829,15 +3834,7 @@
           <a:p>
             <a:r>
               <a:rPr lang="ru-RU" dirty="0"/>
-              <a:t>Для признака Кол-во иждивенцев почти все значения – 0 -</a:t>
-            </a:r>
-            <a:r>
-              <a:rPr lang="en-US" dirty="0"/>
-              <a:t>&gt; </a:t>
-            </a:r>
-            <a:r>
-              <a:rPr lang="ru-RU" dirty="0"/>
-              <a:t>уберем его из выборки, так как он не будет играть никакой роли при сегментации</a:t>
+              <a:t>Для признака Кол-во иждивенцев почти все значения – 0. Можно убрать из выборки, но я оставила</a:t>
             </a:r>
           </a:p>
         </p:txBody>
